--- a/m3/diapositivos/sessao-09-m3-f10.pptx
+++ b/m3/diapositivos/sessao-09-m3-f10.pptx
@@ -4096,7 +4096,35 @@
                 <a:ea typeface="Arial" pitchFamily="34" charset="-122"/>
                 <a:cs typeface="Arial" pitchFamily="34" charset="-120"/>
               </a:rPr>
-              <a:t>Luís de Camões, Os Lusíadas (1572): I, 4 e 5; X, 145.</a:t>
+              <a:t>Luís de Camões, </a:t>
+            </a:r>
+            <a:pPr indent="0" marL="0">
+              <a:buNone/>
+            </a:pPr>
+            <a:r>
+              <a:rPr lang="en-US" sz="1200" i="1" dirty="0">
+                <a:solidFill>
+                  <a:srgbClr val="A9A79F"/>
+                </a:solidFill>
+                <a:latin typeface="Arial" pitchFamily="34" charset="0"/>
+                <a:ea typeface="Arial" pitchFamily="34" charset="-122"/>
+                <a:cs typeface="Arial" pitchFamily="34" charset="-120"/>
+              </a:rPr>
+              <a:t>Os Lusíadas</a:t>
+            </a:r>
+            <a:pPr indent="0" marL="0">
+              <a:buNone/>
+            </a:pPr>
+            <a:r>
+              <a:rPr lang="en-US" sz="1200" dirty="0">
+                <a:solidFill>
+                  <a:srgbClr val="A9A79F"/>
+                </a:solidFill>
+                <a:latin typeface="Arial" pitchFamily="34" charset="0"/>
+                <a:ea typeface="Arial" pitchFamily="34" charset="-122"/>
+                <a:cs typeface="Arial" pitchFamily="34" charset="-120"/>
+              </a:rPr>
+              <a:t> (1572): I, 4 e 5; X, 145.</a:t>
             </a:r>
             <a:endParaRPr lang="en-US" sz="1200" dirty="0"/>
           </a:p>
@@ -4576,7 +4604,35 @@
                 <a:ea typeface="Arial" pitchFamily="34" charset="-122"/>
                 <a:cs typeface="Arial" pitchFamily="34" charset="-120"/>
               </a:rPr>
-              <a:t>Luís de Camões, Os Lusíadas (1572): I, 4 e 5; X, 145.</a:t>
+              <a:t>Luís de Camões, </a:t>
+            </a:r>
+            <a:pPr indent="0" marL="0">
+              <a:buNone/>
+            </a:pPr>
+            <a:r>
+              <a:rPr lang="en-US" sz="1200" i="1" dirty="0">
+                <a:solidFill>
+                  <a:srgbClr val="A9A79F"/>
+                </a:solidFill>
+                <a:latin typeface="Arial" pitchFamily="34" charset="0"/>
+                <a:ea typeface="Arial" pitchFamily="34" charset="-122"/>
+                <a:cs typeface="Arial" pitchFamily="34" charset="-120"/>
+              </a:rPr>
+              <a:t>Os Lusíadas</a:t>
+            </a:r>
+            <a:pPr indent="0" marL="0">
+              <a:buNone/>
+            </a:pPr>
+            <a:r>
+              <a:rPr lang="en-US" sz="1200" dirty="0">
+                <a:solidFill>
+                  <a:srgbClr val="A9A79F"/>
+                </a:solidFill>
+                <a:latin typeface="Arial" pitchFamily="34" charset="0"/>
+                <a:ea typeface="Arial" pitchFamily="34" charset="-122"/>
+                <a:cs typeface="Arial" pitchFamily="34" charset="-120"/>
+              </a:rPr>
+              <a:t> (1572): I, 4 e 5; X, 145.</a:t>
             </a:r>
             <a:endParaRPr lang="en-US" sz="1200" dirty="0"/>
           </a:p>
@@ -5056,7 +5112,35 @@
                 <a:ea typeface="Arial" pitchFamily="34" charset="-122"/>
                 <a:cs typeface="Arial" pitchFamily="34" charset="-120"/>
               </a:rPr>
-              <a:t>Luís de Camões, Os Lusíadas (1572): I, 4 e 5; X, 145.</a:t>
+              <a:t>Luís de Camões, </a:t>
+            </a:r>
+            <a:pPr indent="0" marL="0">
+              <a:buNone/>
+            </a:pPr>
+            <a:r>
+              <a:rPr lang="en-US" sz="1200" i="1" dirty="0">
+                <a:solidFill>
+                  <a:srgbClr val="A9A79F"/>
+                </a:solidFill>
+                <a:latin typeface="Arial" pitchFamily="34" charset="0"/>
+                <a:ea typeface="Arial" pitchFamily="34" charset="-122"/>
+                <a:cs typeface="Arial" pitchFamily="34" charset="-120"/>
+              </a:rPr>
+              <a:t>Os Lusíadas</a:t>
+            </a:r>
+            <a:pPr indent="0" marL="0">
+              <a:buNone/>
+            </a:pPr>
+            <a:r>
+              <a:rPr lang="en-US" sz="1200" dirty="0">
+                <a:solidFill>
+                  <a:srgbClr val="A9A79F"/>
+                </a:solidFill>
+                <a:latin typeface="Arial" pitchFamily="34" charset="0"/>
+                <a:ea typeface="Arial" pitchFamily="34" charset="-122"/>
+                <a:cs typeface="Arial" pitchFamily="34" charset="-120"/>
+              </a:rPr>
+              <a:t> (1572): I, 4 e 5; X, 145.</a:t>
             </a:r>
             <a:endParaRPr lang="en-US" sz="1200" dirty="0"/>
           </a:p>
@@ -5463,7 +5547,41 @@
                 <a:ea typeface="Arial" pitchFamily="34" charset="-122"/>
                 <a:cs typeface="Arial" pitchFamily="34" charset="-120"/>
               </a:rPr>
-              <a:t>No canto I de Os Lusíadas o Poeta pede às Tágides «um som alto e sublimado»; no canto X manda a Musa calar-se: «Nô mais, Musa, nô mais».</a:t>
+              <a:t>No canto I de </a:t>
+            </a:r>
+            <a:pPr indent="0" marL="0">
+              <a:lnSpc>
+                <a:spcPct val="105000"/>
+              </a:lnSpc>
+              <a:buNone/>
+            </a:pPr>
+            <a:r>
+              <a:rPr lang="en-US" sz="2200" i="1" dirty="0">
+                <a:solidFill>
+                  <a:srgbClr val="F2F0EA"/>
+                </a:solidFill>
+                <a:latin typeface="Arial" pitchFamily="34" charset="0"/>
+                <a:ea typeface="Arial" pitchFamily="34" charset="-122"/>
+                <a:cs typeface="Arial" pitchFamily="34" charset="-120"/>
+              </a:rPr>
+              <a:t>Os Lusíadas</a:t>
+            </a:r>
+            <a:pPr indent="0" marL="0">
+              <a:lnSpc>
+                <a:spcPct val="105000"/>
+              </a:lnSpc>
+              <a:buNone/>
+            </a:pPr>
+            <a:r>
+              <a:rPr lang="en-US" sz="2200" dirty="0">
+                <a:solidFill>
+                  <a:srgbClr val="F2F0EA"/>
+                </a:solidFill>
+                <a:latin typeface="Arial" pitchFamily="34" charset="0"/>
+                <a:ea typeface="Arial" pitchFamily="34" charset="-122"/>
+                <a:cs typeface="Arial" pitchFamily="34" charset="-120"/>
+              </a:rPr>
+              <a:t> o Poeta pede às Tágides «um som alto e sublimado»; no canto X manda a Musa calar-se: «Nô mais, Musa, nô mais».</a:t>
             </a:r>
             <a:endParaRPr lang="en-US" sz="2200" dirty="0"/>
           </a:p>
@@ -6906,7 +7024,7 @@
               <a:buNone/>
             </a:pPr>
             <a:r>
-              <a:rPr lang="en-US" sz="2300" dirty="0">
+              <a:rPr lang="en-US" sz="2300" b="1" dirty="0">
                 <a:solidFill>
                   <a:srgbClr val="F2F0EA"/>
                 </a:solidFill>
@@ -6914,7 +7032,92 @@
                 <a:ea typeface="Georgia" pitchFamily="34" charset="-122"/>
                 <a:cs typeface="Georgia" pitchFamily="34" charset="-120"/>
               </a:rPr>
-              <a:t>Pergunta de partida (escolhe ou formula): a Musa é inspiração divina, figura da tradição clássica, ou outra coisa em Camões? Porque pede o Poeta «um som alto» no canto I e diz «Nô mais» no canto X? Estrutura: introdução com tese; dois ou três parágrafos com citações de Os Lusíadas (e, se quiseres, da lírica); conclusão; lista de fontes.</a:t>
+              <a:t>Pergunta de partida</a:t>
+            </a:r>
+            <a:pPr indent="0" marL="0">
+              <a:lnSpc>
+                <a:spcPct val="120000"/>
+              </a:lnSpc>
+              <a:buNone/>
+            </a:pPr>
+            <a:r>
+              <a:rPr lang="en-US" sz="2300" dirty="0">
+                <a:solidFill>
+                  <a:srgbClr val="F2F0EA"/>
+                </a:solidFill>
+                <a:latin typeface="Georgia" pitchFamily="34" charset="0"/>
+                <a:ea typeface="Georgia" pitchFamily="34" charset="-122"/>
+                <a:cs typeface="Georgia" pitchFamily="34" charset="-120"/>
+              </a:rPr>
+              <a:t> (escolhe ou formula): a Musa é inspiração divina, figura da tradição clássica, ou outra coisa em Camões? Porque pede o Poeta «um som alto» no canto I e diz «Nô mais» no canto X? </a:t>
+            </a:r>
+            <a:pPr indent="0" marL="0">
+              <a:lnSpc>
+                <a:spcPct val="120000"/>
+              </a:lnSpc>
+              <a:buNone/>
+            </a:pPr>
+            <a:r>
+              <a:rPr lang="en-US" sz="2300" b="1" dirty="0">
+                <a:solidFill>
+                  <a:srgbClr val="F2F0EA"/>
+                </a:solidFill>
+                <a:latin typeface="Georgia" pitchFamily="34" charset="0"/>
+                <a:ea typeface="Georgia" pitchFamily="34" charset="-122"/>
+                <a:cs typeface="Georgia" pitchFamily="34" charset="-120"/>
+              </a:rPr>
+              <a:t>Estrutura</a:t>
+            </a:r>
+            <a:pPr indent="0" marL="0">
+              <a:lnSpc>
+                <a:spcPct val="120000"/>
+              </a:lnSpc>
+              <a:buNone/>
+            </a:pPr>
+            <a:r>
+              <a:rPr lang="en-US" sz="2300" dirty="0">
+                <a:solidFill>
+                  <a:srgbClr val="F2F0EA"/>
+                </a:solidFill>
+                <a:latin typeface="Georgia" pitchFamily="34" charset="0"/>
+                <a:ea typeface="Georgia" pitchFamily="34" charset="-122"/>
+                <a:cs typeface="Georgia" pitchFamily="34" charset="-120"/>
+              </a:rPr>
+              <a:t>: introdução com tese; dois ou três parágrafos com citações de </a:t>
+            </a:r>
+            <a:pPr indent="0" marL="0">
+              <a:lnSpc>
+                <a:spcPct val="120000"/>
+              </a:lnSpc>
+              <a:buNone/>
+            </a:pPr>
+            <a:r>
+              <a:rPr lang="en-US" sz="2300" i="1" dirty="0">
+                <a:solidFill>
+                  <a:srgbClr val="F2F0EA"/>
+                </a:solidFill>
+                <a:latin typeface="Georgia" pitchFamily="34" charset="0"/>
+                <a:ea typeface="Georgia" pitchFamily="34" charset="-122"/>
+                <a:cs typeface="Georgia" pitchFamily="34" charset="-120"/>
+              </a:rPr>
+              <a:t>Os Lusíadas</a:t>
+            </a:r>
+            <a:pPr indent="0" marL="0">
+              <a:lnSpc>
+                <a:spcPct val="120000"/>
+              </a:lnSpc>
+              <a:buNone/>
+            </a:pPr>
+            <a:r>
+              <a:rPr lang="en-US" sz="2300" dirty="0">
+                <a:solidFill>
+                  <a:srgbClr val="F2F0EA"/>
+                </a:solidFill>
+                <a:latin typeface="Georgia" pitchFamily="34" charset="0"/>
+                <a:ea typeface="Georgia" pitchFamily="34" charset="-122"/>
+                <a:cs typeface="Georgia" pitchFamily="34" charset="-120"/>
+              </a:rPr>
+              <a:t> (e, se quiseres, da lírica); conclusão; lista de fontes.</a:t>
             </a:r>
             <a:endParaRPr lang="en-US" sz="2300" dirty="0"/>
           </a:p>
